--- a/presentation/SatQuery.pptx
+++ b/presentation/SatQuery.pptx
@@ -14723,7 +14723,7 @@
                   <a:schemeClr val="accent3"/>
                 </a:solidFill>
               </a:rPr>
-              <a:t>Deterministic engines measure; a fine-tuned VLM describes.</a:t>
+              <a:t>Deterministic engines measure; a vision-language model describes.</a:t>
             </a:r>
             <a:endParaRPr lang="en-US" sz="1400" dirty="0"/>
           </a:p>
